--- a/Docs/PitchDeck.pptx
+++ b/Docs/PitchDeck.pptx
@@ -10479,7 +10479,7 @@
         </p:nvSpPr>
         <p:spPr>
           <a:xfrm>
-            <a:off x="4295127" y="2640364"/>
+            <a:off x="4491068" y="2640364"/>
             <a:ext cx="3912700" cy="2631490"/>
           </a:xfrm>
           <a:prstGeom prst="rect">
